--- a/Resources-Notes-Ppts/HTML-CSS-JS/HTML-CSS.pptx
+++ b/Resources-Notes-Ppts/HTML-CSS-JS/HTML-CSS.pptx
@@ -2599,6 +2599,13 @@
             <a:schemeClr val="lt1"/>
           </a:fontRef>
         </p:style>
+        <p:txBody>
+          <a:bodyPr/>
+          <a:lstStyle/>
+          <a:p>
+            <a:endParaRPr lang="en-US"/>
+          </a:p>
+        </p:txBody>
       </p:sp>
       <p:sp>
         <p:nvSpPr>
@@ -2790,7 +2797,7 @@
             <a:fld id="{B61BEF0D-F0BB-DE4B-95CE-6DB70DBA9567}" type="datetimeFigureOut">
               <a:rPr lang="en-US" dirty="0"/>
               <a:pPr/>
-              <a:t>9/22/2025</a:t>
+              <a:t>5/11/2026</a:t>
             </a:fld>
             <a:endParaRPr lang="en-US" dirty="0"/>
           </a:p>
@@ -3052,7 +3059,7 @@
             <a:fld id="{B61BEF0D-F0BB-DE4B-95CE-6DB70DBA9567}" type="datetimeFigureOut">
               <a:rPr lang="en-US" dirty="0"/>
               <a:pPr/>
-              <a:t>9/22/2025</a:t>
+              <a:t>5/11/2026</a:t>
             </a:fld>
             <a:endParaRPr lang="en-US" dirty="0"/>
           </a:p>
@@ -3287,7 +3294,7 @@
             <a:fld id="{B61BEF0D-F0BB-DE4B-95CE-6DB70DBA9567}" type="datetimeFigureOut">
               <a:rPr lang="en-US" dirty="0"/>
               <a:pPr/>
-              <a:t>9/22/2025</a:t>
+              <a:t>5/11/2026</a:t>
             </a:fld>
             <a:endParaRPr lang="en-US" dirty="0"/>
           </a:p>
@@ -3425,6 +3432,13 @@
             <a:schemeClr val="lt1"/>
           </a:fontRef>
         </p:style>
+        <p:txBody>
+          <a:bodyPr/>
+          <a:lstStyle/>
+          <a:p>
+            <a:endParaRPr lang="en-US"/>
+          </a:p>
+        </p:txBody>
       </p:sp>
       <p:sp>
         <p:nvSpPr>
@@ -3527,7 +3541,7 @@
             <a:fld id="{B61BEF0D-F0BB-DE4B-95CE-6DB70DBA9567}" type="datetimeFigureOut">
               <a:rPr lang="en-US" dirty="0"/>
               <a:pPr/>
-              <a:t>9/22/2025</a:t>
+              <a:t>5/11/2026</a:t>
             </a:fld>
             <a:endParaRPr lang="en-US" dirty="0"/>
           </a:p>
@@ -3835,7 +3849,7 @@
             <a:fld id="{B61BEF0D-F0BB-DE4B-95CE-6DB70DBA9567}" type="datetimeFigureOut">
               <a:rPr lang="en-US" dirty="0"/>
               <a:pPr/>
-              <a:t>9/22/2025</a:t>
+              <a:t>5/11/2026</a:t>
             </a:fld>
             <a:endParaRPr lang="en-US" dirty="0"/>
           </a:p>
@@ -4136,7 +4150,7 @@
             <a:fld id="{B61BEF0D-F0BB-DE4B-95CE-6DB70DBA9567}" type="datetimeFigureOut">
               <a:rPr lang="en-US" dirty="0"/>
               <a:pPr/>
-              <a:t>9/22/2025</a:t>
+              <a:t>5/11/2026</a:t>
             </a:fld>
             <a:endParaRPr lang="en-US" dirty="0"/>
           </a:p>
@@ -4557,7 +4571,7 @@
             <a:fld id="{B61BEF0D-F0BB-DE4B-95CE-6DB70DBA9567}" type="datetimeFigureOut">
               <a:rPr lang="en-US" dirty="0"/>
               <a:pPr/>
-              <a:t>9/22/2025</a:t>
+              <a:t>5/11/2026</a:t>
             </a:fld>
             <a:endParaRPr lang="en-US" dirty="0"/>
           </a:p>
@@ -4720,7 +4734,7 @@
             <a:fld id="{B61BEF0D-F0BB-DE4B-95CE-6DB70DBA9567}" type="datetimeFigureOut">
               <a:rPr lang="en-US" dirty="0"/>
               <a:pPr/>
-              <a:t>9/22/2025</a:t>
+              <a:t>5/11/2026</a:t>
             </a:fld>
             <a:endParaRPr lang="en-US" dirty="0"/>
           </a:p>
@@ -4817,7 +4831,7 @@
             <a:fld id="{B61BEF0D-F0BB-DE4B-95CE-6DB70DBA9567}" type="datetimeFigureOut">
               <a:rPr lang="en-US" dirty="0"/>
               <a:pPr/>
-              <a:t>9/22/2025</a:t>
+              <a:t>5/11/2026</a:t>
             </a:fld>
             <a:endParaRPr lang="en-US" dirty="0"/>
           </a:p>
@@ -5195,7 +5209,7 @@
             <a:fld id="{B61BEF0D-F0BB-DE4B-95CE-6DB70DBA9567}" type="datetimeFigureOut">
               <a:rPr lang="en-US" dirty="0"/>
               <a:pPr/>
-              <a:t>9/22/2025</a:t>
+              <a:t>5/11/2026</a:t>
             </a:fld>
             <a:endParaRPr lang="en-US" dirty="0"/>
           </a:p>
@@ -5481,7 +5495,7 @@
             <a:fld id="{B61BEF0D-F0BB-DE4B-95CE-6DB70DBA9567}" type="datetimeFigureOut">
               <a:rPr lang="en-US" dirty="0"/>
               <a:pPr/>
-              <a:t>9/22/2025</a:t>
+              <a:t>5/11/2026</a:t>
             </a:fld>
             <a:endParaRPr lang="en-US" dirty="0"/>
           </a:p>
@@ -5720,7 +5734,7 @@
             <a:fld id="{B61BEF0D-F0BB-DE4B-95CE-6DB70DBA9567}" type="datetimeFigureOut">
               <a:rPr lang="en-US" dirty="0"/>
               <a:pPr/>
-              <a:t>9/22/2025</a:t>
+              <a:t>5/11/2026</a:t>
             </a:fld>
             <a:endParaRPr lang="en-US" dirty="0"/>
           </a:p>
@@ -5837,6 +5851,13 @@
             <a:schemeClr val="lt1"/>
           </a:fontRef>
         </p:style>
+        <p:txBody>
+          <a:bodyPr/>
+          <a:lstStyle/>
+          <a:p>
+            <a:endParaRPr lang="en-US"/>
+          </a:p>
+        </p:txBody>
       </p:sp>
       <p:sp>
         <p:nvSpPr>
@@ -5874,6 +5895,13 @@
             <a:schemeClr val="lt1"/>
           </a:fontRef>
         </p:style>
+        <p:txBody>
+          <a:bodyPr/>
+          <a:lstStyle/>
+          <a:p>
+            <a:endParaRPr lang="en-US"/>
+          </a:p>
+        </p:txBody>
       </p:sp>
       <p:sp>
         <p:nvSpPr>
@@ -5911,6 +5939,13 @@
             <a:schemeClr val="lt1"/>
           </a:fontRef>
         </p:style>
+        <p:txBody>
+          <a:bodyPr/>
+          <a:lstStyle/>
+          <a:p>
+            <a:endParaRPr lang="en-US"/>
+          </a:p>
+        </p:txBody>
       </p:sp>
     </p:spTree>
     <p:extLst>
@@ -8049,7 +8084,7 @@
           <a:p>
             <a:r>
               <a:rPr lang="en-US" dirty="0"/>
-              <a:t>Further develop the site by creating a header that captures the attention of the viewer and sells to product (think of a tagline)</a:t>
+              <a:t>Further develop the site by creating a header that captures the attention of the viewer and sells the product (think of a tagline)</a:t>
             </a:r>
           </a:p>
           <a:p>
@@ -11554,6 +11589,12 @@
             <a:r>
               <a:rPr lang="en-US" dirty="0"/>
               <a:t>Include a background color for your header, change the text color as necessary to match your header </a:t>
+            </a:r>
+          </a:p>
+          <a:p>
+            <a:r>
+              <a:rPr lang="en-US" dirty="0"/>
+              <a:t>Set an appropriate font size for all text on our page</a:t>
             </a:r>
           </a:p>
         </p:txBody>
